--- a/docs/songs/king of my heart.pptx
+++ b/docs/songs/king of my heart.pptx
@@ -5,15 +5,16 @@
     <p:sldMasterId id="2147483648" r:id="rId1"/>
   </p:sldMasterIdLst>
   <p:notesMasterIdLst>
-    <p:notesMasterId r:id="rId8"/>
+    <p:notesMasterId r:id="rId9"/>
   </p:notesMasterIdLst>
   <p:sldIdLst>
     <p:sldId id="256" r:id="rId2"/>
     <p:sldId id="523" r:id="rId3"/>
     <p:sldId id="524" r:id="rId4"/>
     <p:sldId id="525" r:id="rId5"/>
-    <p:sldId id="526" r:id="rId6"/>
-    <p:sldId id="527" r:id="rId7"/>
+    <p:sldId id="528" r:id="rId6"/>
+    <p:sldId id="526" r:id="rId7"/>
+    <p:sldId id="529" r:id="rId8"/>
   </p:sldIdLst>
   <p:sldSz cx="9144000" cy="6858000" type="screen4x3"/>
   <p:notesSz cx="6858000" cy="9144000"/>
@@ -213,7 +214,7 @@
           <a:p>
             <a:fld id="{C57EAEFC-A9C7-464E-BE3F-33D4DD72E122}" type="datetimeFigureOut">
               <a:rPr lang="en-GB" smtClean="0"/>
-              <a:t>08/11/2023</a:t>
+              <a:t>23/03/2026</a:t>
             </a:fld>
             <a:endParaRPr lang="en-GB"/>
           </a:p>
@@ -663,7 +664,7 @@
             <a:fld id="{26EA1CF3-4A15-4CBF-9A5A-6A56C368BE71}" type="datetimeFigureOut">
               <a:rPr lang="en-GB" smtClean="0"/>
               <a:pPr/>
-              <a:t>08/11/2023</a:t>
+              <a:t>23/03/2026</a:t>
             </a:fld>
             <a:endParaRPr lang="en-GB"/>
           </a:p>
@@ -830,7 +831,7 @@
             <a:fld id="{26EA1CF3-4A15-4CBF-9A5A-6A56C368BE71}" type="datetimeFigureOut">
               <a:rPr lang="en-GB" smtClean="0"/>
               <a:pPr/>
-              <a:t>08/11/2023</a:t>
+              <a:t>23/03/2026</a:t>
             </a:fld>
             <a:endParaRPr lang="en-GB"/>
           </a:p>
@@ -1007,7 +1008,7 @@
             <a:fld id="{26EA1CF3-4A15-4CBF-9A5A-6A56C368BE71}" type="datetimeFigureOut">
               <a:rPr lang="en-GB" smtClean="0"/>
               <a:pPr/>
-              <a:t>08/11/2023</a:t>
+              <a:t>23/03/2026</a:t>
             </a:fld>
             <a:endParaRPr lang="en-GB"/>
           </a:p>
@@ -1174,7 +1175,7 @@
             <a:fld id="{26EA1CF3-4A15-4CBF-9A5A-6A56C368BE71}" type="datetimeFigureOut">
               <a:rPr lang="en-GB" smtClean="0"/>
               <a:pPr/>
-              <a:t>08/11/2023</a:t>
+              <a:t>23/03/2026</a:t>
             </a:fld>
             <a:endParaRPr lang="en-GB"/>
           </a:p>
@@ -1417,7 +1418,7 @@
             <a:fld id="{26EA1CF3-4A15-4CBF-9A5A-6A56C368BE71}" type="datetimeFigureOut">
               <a:rPr lang="en-GB" smtClean="0"/>
               <a:pPr/>
-              <a:t>08/11/2023</a:t>
+              <a:t>23/03/2026</a:t>
             </a:fld>
             <a:endParaRPr lang="en-GB"/>
           </a:p>
@@ -1702,7 +1703,7 @@
             <a:fld id="{26EA1CF3-4A15-4CBF-9A5A-6A56C368BE71}" type="datetimeFigureOut">
               <a:rPr lang="en-GB" smtClean="0"/>
               <a:pPr/>
-              <a:t>08/11/2023</a:t>
+              <a:t>23/03/2026</a:t>
             </a:fld>
             <a:endParaRPr lang="en-GB"/>
           </a:p>
@@ -2121,7 +2122,7 @@
             <a:fld id="{26EA1CF3-4A15-4CBF-9A5A-6A56C368BE71}" type="datetimeFigureOut">
               <a:rPr lang="en-GB" smtClean="0"/>
               <a:pPr/>
-              <a:t>08/11/2023</a:t>
+              <a:t>23/03/2026</a:t>
             </a:fld>
             <a:endParaRPr lang="en-GB"/>
           </a:p>
@@ -2236,7 +2237,7 @@
             <a:fld id="{26EA1CF3-4A15-4CBF-9A5A-6A56C368BE71}" type="datetimeFigureOut">
               <a:rPr lang="en-GB" smtClean="0"/>
               <a:pPr/>
-              <a:t>08/11/2023</a:t>
+              <a:t>23/03/2026</a:t>
             </a:fld>
             <a:endParaRPr lang="en-GB"/>
           </a:p>
@@ -2328,7 +2329,7 @@
             <a:fld id="{26EA1CF3-4A15-4CBF-9A5A-6A56C368BE71}" type="datetimeFigureOut">
               <a:rPr lang="en-GB" smtClean="0"/>
               <a:pPr/>
-              <a:t>08/11/2023</a:t>
+              <a:t>23/03/2026</a:t>
             </a:fld>
             <a:endParaRPr lang="en-GB"/>
           </a:p>
@@ -2602,7 +2603,7 @@
             <a:fld id="{26EA1CF3-4A15-4CBF-9A5A-6A56C368BE71}" type="datetimeFigureOut">
               <a:rPr lang="en-GB" smtClean="0"/>
               <a:pPr/>
-              <a:t>08/11/2023</a:t>
+              <a:t>23/03/2026</a:t>
             </a:fld>
             <a:endParaRPr lang="en-GB"/>
           </a:p>
@@ -2852,7 +2853,7 @@
             <a:fld id="{26EA1CF3-4A15-4CBF-9A5A-6A56C368BE71}" type="datetimeFigureOut">
               <a:rPr lang="en-GB" smtClean="0"/>
               <a:pPr/>
-              <a:t>08/11/2023</a:t>
+              <a:t>23/03/2026</a:t>
             </a:fld>
             <a:endParaRPr lang="en-GB"/>
           </a:p>
@@ -3061,7 +3062,7 @@
             <a:fld id="{26EA1CF3-4A15-4CBF-9A5A-6A56C368BE71}" type="datetimeFigureOut">
               <a:rPr lang="en-GB" smtClean="0"/>
               <a:pPr/>
-              <a:t>08/11/2023</a:t>
+              <a:t>23/03/2026</a:t>
             </a:fld>
             <a:endParaRPr lang="en-GB"/>
           </a:p>
@@ -3791,7 +3792,7 @@
                   <a:schemeClr val="bg1"/>
                 </a:solidFill>
               </a:rPr>
-              <a:t>Oh He is my song</a:t>
+              <a:t>Oh, He is my song</a:t>
             </a:r>
           </a:p>
           <a:p>
@@ -3831,7 +3832,7 @@
                   <a:schemeClr val="bg1"/>
                 </a:solidFill>
               </a:rPr>
-              <a:t>Oh He is my song</a:t>
+              <a:t>Oh, He is my song</a:t>
             </a:r>
           </a:p>
         </p:txBody>
@@ -3864,7 +3865,7 @@
                   <a:schemeClr val="bg1"/>
                 </a:solidFill>
               </a:rPr>
-              <a:t>1/5</a:t>
+              <a:t>1/6</a:t>
             </a:r>
           </a:p>
         </p:txBody>
@@ -4054,7 +4055,7 @@
                   <a:schemeClr val="bg1"/>
                 </a:solidFill>
               </a:rPr>
-              <a:t>2/5</a:t>
+              <a:t>2/6</a:t>
             </a:r>
           </a:p>
         </p:txBody>
@@ -4147,7 +4148,7 @@
                   <a:schemeClr val="bg1"/>
                 </a:solidFill>
               </a:rPr>
-              <a:t>Oh He is my song</a:t>
+              <a:t>Oh, He is my song</a:t>
             </a:r>
           </a:p>
           <a:p>
@@ -4187,7 +4188,7 @@
                   <a:schemeClr val="bg1"/>
                 </a:solidFill>
               </a:rPr>
-              <a:t>Oh He is my song</a:t>
+              <a:t>Oh, He is my song</a:t>
             </a:r>
           </a:p>
         </p:txBody>
@@ -4220,7 +4221,7 @@
                   <a:schemeClr val="bg1"/>
                 </a:solidFill>
               </a:rPr>
-              <a:t>3/5</a:t>
+              <a:t>3/6</a:t>
             </a:r>
           </a:p>
         </p:txBody>
@@ -4243,7 +4244,13 @@
   <p:cSld>
     <p:spTree>
       <p:nvGrpSpPr>
-        <p:cNvPr id="1" name=""/>
+        <p:cNvPr id="1" name="">
+          <a:extLst>
+            <a:ext uri="{FF2B5EF4-FFF2-40B4-BE49-F238E27FC236}">
+              <a16:creationId xmlns:a16="http://schemas.microsoft.com/office/drawing/2014/main" id="{6AC5B353-504D-3C4F-F30F-37A47BC9F710}"/>
+            </a:ext>
+          </a:extLst>
+        </p:cNvPr>
         <p:cNvGrpSpPr/>
         <p:nvPr/>
       </p:nvGrpSpPr>
@@ -4257,7 +4264,13 @@
       </p:grpSpPr>
       <p:sp>
         <p:nvSpPr>
-          <p:cNvPr id="3" name="Subtitle 2"/>
+          <p:cNvPr id="3" name="Subtitle 2">
+            <a:extLst>
+              <a:ext uri="{FF2B5EF4-FFF2-40B4-BE49-F238E27FC236}">
+                <a16:creationId xmlns:a16="http://schemas.microsoft.com/office/drawing/2014/main" id="{B780B021-E440-77B1-BD6F-A08BE71A9516}"/>
+              </a:ext>
+            </a:extLst>
+          </p:cNvPr>
           <p:cNvSpPr>
             <a:spLocks noGrp="1"/>
           </p:cNvSpPr>
@@ -4278,230 +4291,119 @@
           <a:lstStyle/>
           <a:p>
             <a:r>
-              <a:rPr lang="en-GB" sz="3600" dirty="0">
-                <a:solidFill>
-                  <a:schemeClr val="bg1"/>
-                </a:solidFill>
-              </a:rPr>
-              <a:t>You're never </a:t>
-            </a:r>
-            <a:r>
-              <a:rPr lang="en-GB" sz="3600" dirty="0" err="1">
-                <a:solidFill>
-                  <a:schemeClr val="bg1"/>
-                </a:solidFill>
-              </a:rPr>
-              <a:t>gonna</a:t>
-            </a:r>
-            <a:r>
-              <a:rPr lang="en-GB" sz="3600" dirty="0">
-                <a:solidFill>
-                  <a:schemeClr val="bg1"/>
-                </a:solidFill>
-              </a:rPr>
-              <a:t> let</a:t>
-            </a:r>
-          </a:p>
-          <a:p>
-            <a:r>
-              <a:rPr lang="en-GB" sz="3600" dirty="0">
-                <a:solidFill>
-                  <a:schemeClr val="bg1"/>
-                </a:solidFill>
-              </a:rPr>
-              <a:t>Never </a:t>
-            </a:r>
-            <a:r>
-              <a:rPr lang="en-GB" sz="3600" dirty="0" err="1">
-                <a:solidFill>
-                  <a:schemeClr val="bg1"/>
-                </a:solidFill>
-              </a:rPr>
-              <a:t>gonna</a:t>
-            </a:r>
-            <a:r>
-              <a:rPr lang="en-GB" sz="3600" dirty="0">
-                <a:solidFill>
-                  <a:schemeClr val="bg1"/>
-                </a:solidFill>
-              </a:rPr>
-              <a:t> let me down</a:t>
-            </a:r>
-          </a:p>
-          <a:p>
-            <a:r>
-              <a:rPr lang="en-GB" sz="3600" dirty="0">
-                <a:solidFill>
-                  <a:schemeClr val="bg1"/>
-                </a:solidFill>
-              </a:rPr>
-              <a:t>You're never </a:t>
-            </a:r>
-            <a:r>
-              <a:rPr lang="en-GB" sz="3600" dirty="0" err="1">
-                <a:solidFill>
-                  <a:schemeClr val="bg1"/>
-                </a:solidFill>
-              </a:rPr>
-              <a:t>gonna</a:t>
-            </a:r>
-            <a:r>
-              <a:rPr lang="en-GB" sz="3600" dirty="0">
-                <a:solidFill>
-                  <a:schemeClr val="bg1"/>
-                </a:solidFill>
-              </a:rPr>
-              <a:t> let</a:t>
-            </a:r>
-          </a:p>
-          <a:p>
-            <a:r>
-              <a:rPr lang="en-GB" sz="3600" dirty="0">
-                <a:solidFill>
-                  <a:schemeClr val="bg1"/>
-                </a:solidFill>
-              </a:rPr>
-              <a:t>Never </a:t>
-            </a:r>
-            <a:r>
-              <a:rPr lang="en-GB" sz="3600" dirty="0" err="1">
-                <a:solidFill>
-                  <a:schemeClr val="bg1"/>
-                </a:solidFill>
-              </a:rPr>
-              <a:t>gonna</a:t>
-            </a:r>
-            <a:r>
-              <a:rPr lang="en-GB" sz="3600" dirty="0">
-                <a:solidFill>
-                  <a:schemeClr val="bg1"/>
-                </a:solidFill>
-              </a:rPr>
-              <a:t> let me down</a:t>
-            </a:r>
-          </a:p>
-          <a:p>
-            <a:r>
-              <a:rPr lang="en-GB" sz="3600" dirty="0">
-                <a:solidFill>
-                  <a:schemeClr val="bg1"/>
-                </a:solidFill>
-              </a:rPr>
-              <a:t>You're never </a:t>
-            </a:r>
-            <a:r>
-              <a:rPr lang="en-GB" sz="3600" dirty="0" err="1">
-                <a:solidFill>
-                  <a:schemeClr val="bg1"/>
-                </a:solidFill>
-              </a:rPr>
-              <a:t>gonna</a:t>
-            </a:r>
-            <a:r>
-              <a:rPr lang="en-GB" sz="3600" dirty="0">
-                <a:solidFill>
-                  <a:schemeClr val="bg1"/>
-                </a:solidFill>
-              </a:rPr>
-              <a:t> let</a:t>
-            </a:r>
-          </a:p>
-          <a:p>
-            <a:r>
-              <a:rPr lang="en-GB" sz="3600" dirty="0">
-                <a:solidFill>
-                  <a:schemeClr val="bg1"/>
-                </a:solidFill>
-              </a:rPr>
-              <a:t>Never </a:t>
-            </a:r>
-            <a:r>
-              <a:rPr lang="en-GB" sz="3600" dirty="0" err="1">
-                <a:solidFill>
-                  <a:schemeClr val="bg1"/>
-                </a:solidFill>
-              </a:rPr>
-              <a:t>gonna</a:t>
-            </a:r>
-            <a:r>
-              <a:rPr lang="en-GB" sz="3600" dirty="0">
-                <a:solidFill>
-                  <a:schemeClr val="bg1"/>
-                </a:solidFill>
-              </a:rPr>
-              <a:t> let me down</a:t>
-            </a:r>
-          </a:p>
-          <a:p>
-            <a:r>
-              <a:rPr lang="en-GB" sz="3600" dirty="0">
-                <a:solidFill>
-                  <a:schemeClr val="bg1"/>
-                </a:solidFill>
-              </a:rPr>
-              <a:t>You're never </a:t>
-            </a:r>
-            <a:r>
-              <a:rPr lang="en-GB" sz="3600" dirty="0" err="1">
-                <a:solidFill>
-                  <a:schemeClr val="bg1"/>
-                </a:solidFill>
-              </a:rPr>
-              <a:t>gonna</a:t>
-            </a:r>
-            <a:r>
-              <a:rPr lang="en-GB" sz="3600" dirty="0">
-                <a:solidFill>
-                  <a:schemeClr val="bg1"/>
-                </a:solidFill>
-              </a:rPr>
-              <a:t> let</a:t>
-            </a:r>
-          </a:p>
-          <a:p>
-            <a:r>
-              <a:rPr lang="en-GB" sz="3600" dirty="0">
-                <a:solidFill>
-                  <a:schemeClr val="bg1"/>
-                </a:solidFill>
-              </a:rPr>
-              <a:t>Never </a:t>
-            </a:r>
-            <a:r>
-              <a:rPr lang="en-GB" sz="3600" dirty="0" err="1">
-                <a:solidFill>
-                  <a:schemeClr val="bg1"/>
-                </a:solidFill>
-              </a:rPr>
-              <a:t>gonna</a:t>
-            </a:r>
-            <a:r>
-              <a:rPr lang="en-GB" sz="3600" dirty="0">
-                <a:solidFill>
-                  <a:schemeClr val="bg1"/>
-                </a:solidFill>
-              </a:rPr>
-              <a:t> let me </a:t>
-            </a:r>
-            <a:r>
-              <a:rPr lang="en-GB" sz="3600" dirty="0" err="1">
-                <a:solidFill>
-                  <a:schemeClr val="bg1"/>
-                </a:solidFill>
-              </a:rPr>
-              <a:t>dow</a:t>
-            </a:r>
-            <a:endParaRPr lang="en-GB" sz="3600" dirty="0">
-              <a:solidFill>
-                <a:schemeClr val="bg1"/>
-              </a:solidFill>
-            </a:endParaRPr>
-          </a:p>
-        </p:txBody>
-      </p:sp>
-      <p:sp>
-        <p:nvSpPr>
-          <p:cNvPr id="4" name="TextBox 3"/>
+              <a:rPr lang="en-GB" sz="4000" dirty="0">
+                <a:solidFill>
+                  <a:schemeClr val="bg1"/>
+                </a:solidFill>
+              </a:rPr>
+              <a:t>You are good </a:t>
+            </a:r>
+            <a:r>
+              <a:rPr lang="en-GB" sz="4000" dirty="0" err="1">
+                <a:solidFill>
+                  <a:schemeClr val="bg1"/>
+                </a:solidFill>
+              </a:rPr>
+              <a:t>good</a:t>
+            </a:r>
+            <a:r>
+              <a:rPr lang="en-GB" sz="4000" dirty="0">
+                <a:solidFill>
+                  <a:schemeClr val="bg1"/>
+                </a:solidFill>
+              </a:rPr>
+              <a:t> oh</a:t>
+            </a:r>
+          </a:p>
+          <a:p>
+            <a:r>
+              <a:rPr lang="en-GB" sz="4000" dirty="0">
+                <a:solidFill>
+                  <a:schemeClr val="bg1"/>
+                </a:solidFill>
+              </a:rPr>
+              <a:t>You are good </a:t>
+            </a:r>
+            <a:r>
+              <a:rPr lang="en-GB" sz="4000" dirty="0" err="1">
+                <a:solidFill>
+                  <a:schemeClr val="bg1"/>
+                </a:solidFill>
+              </a:rPr>
+              <a:t>good</a:t>
+            </a:r>
+            <a:r>
+              <a:rPr lang="en-GB" sz="4000" dirty="0">
+                <a:solidFill>
+                  <a:schemeClr val="bg1"/>
+                </a:solidFill>
+              </a:rPr>
+              <a:t> oh</a:t>
+            </a:r>
+          </a:p>
+          <a:p>
+            <a:r>
+              <a:rPr lang="en-GB" sz="4000" dirty="0">
+                <a:solidFill>
+                  <a:schemeClr val="bg1"/>
+                </a:solidFill>
+              </a:rPr>
+              <a:t>You are good </a:t>
+            </a:r>
+            <a:r>
+              <a:rPr lang="en-GB" sz="4000" dirty="0" err="1">
+                <a:solidFill>
+                  <a:schemeClr val="bg1"/>
+                </a:solidFill>
+              </a:rPr>
+              <a:t>good</a:t>
+            </a:r>
+            <a:r>
+              <a:rPr lang="en-GB" sz="4000" dirty="0">
+                <a:solidFill>
+                  <a:schemeClr val="bg1"/>
+                </a:solidFill>
+              </a:rPr>
+              <a:t> oh</a:t>
+            </a:r>
+          </a:p>
+          <a:p>
+            <a:r>
+              <a:rPr lang="en-GB" sz="4000" dirty="0">
+                <a:solidFill>
+                  <a:schemeClr val="bg1"/>
+                </a:solidFill>
+              </a:rPr>
+              <a:t>You are good </a:t>
+            </a:r>
+            <a:r>
+              <a:rPr lang="en-GB" sz="4000" dirty="0" err="1">
+                <a:solidFill>
+                  <a:schemeClr val="bg1"/>
+                </a:solidFill>
+              </a:rPr>
+              <a:t>good</a:t>
+            </a:r>
+            <a:r>
+              <a:rPr lang="en-GB" sz="4000" dirty="0">
+                <a:solidFill>
+                  <a:schemeClr val="bg1"/>
+                </a:solidFill>
+              </a:rPr>
+              <a:t> oh</a:t>
+            </a:r>
+          </a:p>
+        </p:txBody>
+      </p:sp>
+      <p:sp>
+        <p:nvSpPr>
+          <p:cNvPr id="4" name="TextBox 3">
+            <a:extLst>
+              <a:ext uri="{FF2B5EF4-FFF2-40B4-BE49-F238E27FC236}">
+                <a16:creationId xmlns:a16="http://schemas.microsoft.com/office/drawing/2014/main" id="{4301AB20-7B26-EA27-EEB7-E2D559BE318C}"/>
+              </a:ext>
+            </a:extLst>
+          </p:cNvPr>
           <p:cNvSpPr txBox="1"/>
           <p:nvPr/>
         </p:nvSpPr>
@@ -4527,7 +4429,7 @@
                   <a:schemeClr val="bg1"/>
                 </a:solidFill>
               </a:rPr>
-              <a:t>4/5</a:t>
+              <a:t>4/6</a:t>
             </a:r>
           </a:p>
         </p:txBody>
@@ -4535,7 +4437,7 @@
     </p:spTree>
     <p:extLst>
       <p:ext uri="{BB962C8B-B14F-4D97-AF65-F5344CB8AC3E}">
-        <p14:creationId xmlns:p14="http://schemas.microsoft.com/office/powerpoint/2010/main" val="4168413159"/>
+        <p14:creationId xmlns:p14="http://schemas.microsoft.com/office/powerpoint/2010/main" val="2284891801"/>
       </p:ext>
     </p:extLst>
   </p:cSld>
@@ -4590,17 +4492,23 @@
                   <a:schemeClr val="bg1"/>
                 </a:solidFill>
               </a:rPr>
-              <a:t>When the night is holding on to me</a:t>
-            </a:r>
-          </a:p>
-          <a:p>
+              <a:t>You're never </a:t>
+            </a:r>
+            <a:r>
+              <a:rPr lang="en-GB" sz="3600" dirty="0" err="1">
+                <a:solidFill>
+                  <a:schemeClr val="bg1"/>
+                </a:solidFill>
+              </a:rPr>
+              <a:t>gonna</a:t>
+            </a:r>
             <a:r>
               <a:rPr lang="en-GB" sz="3600" dirty="0">
                 <a:solidFill>
                   <a:schemeClr val="bg1"/>
                 </a:solidFill>
               </a:rPr>
-              <a:t>God is holding on</a:t>
+              <a:t> let</a:t>
             </a:r>
           </a:p>
           <a:p>
@@ -4610,17 +4518,45 @@
                   <a:schemeClr val="bg1"/>
                 </a:solidFill>
               </a:rPr>
-              <a:t>When the night is holding on to me</a:t>
-            </a:r>
-          </a:p>
-          <a:p>
+              <a:t>You’re never </a:t>
+            </a:r>
+            <a:r>
+              <a:rPr lang="en-GB" sz="3600" dirty="0" err="1">
+                <a:solidFill>
+                  <a:schemeClr val="bg1"/>
+                </a:solidFill>
+              </a:rPr>
+              <a:t>gonna</a:t>
+            </a:r>
             <a:r>
               <a:rPr lang="en-GB" sz="3600" dirty="0">
                 <a:solidFill>
                   <a:schemeClr val="bg1"/>
                 </a:solidFill>
               </a:rPr>
-              <a:t>God is holding on</a:t>
+              <a:t> let me down</a:t>
+            </a:r>
+            <a:br>
+              <a:rPr lang="en-GB" sz="3600" dirty="0">
+                <a:solidFill>
+                  <a:schemeClr val="bg1"/>
+                </a:solidFill>
+              </a:rPr>
+            </a:br>
+            <a:br>
+              <a:rPr lang="en-GB" sz="3600" dirty="0">
+                <a:solidFill>
+                  <a:schemeClr val="bg1"/>
+                </a:solidFill>
+              </a:rPr>
+            </a:br>
+            <a:r>
+              <a:rPr lang="en-GB" sz="3600" dirty="0">
+                <a:solidFill>
+                  <a:schemeClr val="bg1"/>
+                </a:solidFill>
+              </a:rPr>
+              <a:t>(REPEAT)</a:t>
             </a:r>
           </a:p>
         </p:txBody>
@@ -4653,7 +4589,7 @@
                   <a:schemeClr val="bg1"/>
                 </a:solidFill>
               </a:rPr>
-              <a:t>5/5</a:t>
+              <a:t>5/6</a:t>
             </a:r>
           </a:p>
         </p:txBody>
@@ -4661,7 +4597,215 @@
     </p:spTree>
     <p:extLst>
       <p:ext uri="{BB962C8B-B14F-4D97-AF65-F5344CB8AC3E}">
-        <p14:creationId xmlns:p14="http://schemas.microsoft.com/office/powerpoint/2010/main" val="3704533272"/>
+        <p14:creationId xmlns:p14="http://schemas.microsoft.com/office/powerpoint/2010/main" val="4168413159"/>
+      </p:ext>
+    </p:extLst>
+  </p:cSld>
+  <p:clrMapOvr>
+    <a:masterClrMapping/>
+  </p:clrMapOvr>
+</p:sld>
+</file>
+
+<file path=ppt/slides/slide7.xml><?xml version="1.0" encoding="utf-8"?>
+<p:sld xmlns:a="http://schemas.openxmlformats.org/drawingml/2006/main" xmlns:r="http://schemas.openxmlformats.org/officeDocument/2006/relationships" xmlns:p="http://schemas.openxmlformats.org/presentationml/2006/main">
+  <p:cSld>
+    <p:spTree>
+      <p:nvGrpSpPr>
+        <p:cNvPr id="1" name="">
+          <a:extLst>
+            <a:ext uri="{FF2B5EF4-FFF2-40B4-BE49-F238E27FC236}">
+              <a16:creationId xmlns:a16="http://schemas.microsoft.com/office/drawing/2014/main" id="{F7BBE868-2F9A-C857-53A7-3CF458999034}"/>
+            </a:ext>
+          </a:extLst>
+        </p:cNvPr>
+        <p:cNvGrpSpPr/>
+        <p:nvPr/>
+      </p:nvGrpSpPr>
+      <p:grpSpPr>
+        <a:xfrm>
+          <a:off x="0" y="0"/>
+          <a:ext cx="0" cy="0"/>
+          <a:chOff x="0" y="0"/>
+          <a:chExt cx="0" cy="0"/>
+        </a:xfrm>
+      </p:grpSpPr>
+      <p:sp>
+        <p:nvSpPr>
+          <p:cNvPr id="3" name="Subtitle 2">
+            <a:extLst>
+              <a:ext uri="{FF2B5EF4-FFF2-40B4-BE49-F238E27FC236}">
+                <a16:creationId xmlns:a16="http://schemas.microsoft.com/office/drawing/2014/main" id="{FAF74F1A-35EC-1105-1821-3F631DBCC214}"/>
+              </a:ext>
+            </a:extLst>
+          </p:cNvPr>
+          <p:cNvSpPr>
+            <a:spLocks noGrp="1"/>
+          </p:cNvSpPr>
+          <p:nvPr>
+            <p:ph type="subTitle" idx="1"/>
+          </p:nvPr>
+        </p:nvSpPr>
+        <p:spPr>
+          <a:xfrm>
+            <a:off x="107504" y="836712"/>
+            <a:ext cx="8640960" cy="6480720"/>
+          </a:xfrm>
+        </p:spPr>
+        <p:txBody>
+          <a:bodyPr>
+            <a:noAutofit/>
+          </a:bodyPr>
+          <a:lstStyle/>
+          <a:p>
+            <a:r>
+              <a:rPr lang="en-GB" sz="4000" dirty="0">
+                <a:solidFill>
+                  <a:schemeClr val="bg1"/>
+                </a:solidFill>
+              </a:rPr>
+              <a:t>You are good </a:t>
+            </a:r>
+            <a:r>
+              <a:rPr lang="en-GB" sz="4000" dirty="0" err="1">
+                <a:solidFill>
+                  <a:schemeClr val="bg1"/>
+                </a:solidFill>
+              </a:rPr>
+              <a:t>good</a:t>
+            </a:r>
+            <a:r>
+              <a:rPr lang="en-GB" sz="4000" dirty="0">
+                <a:solidFill>
+                  <a:schemeClr val="bg1"/>
+                </a:solidFill>
+              </a:rPr>
+              <a:t> oh</a:t>
+            </a:r>
+          </a:p>
+          <a:p>
+            <a:r>
+              <a:rPr lang="en-GB" sz="4000" dirty="0">
+                <a:solidFill>
+                  <a:schemeClr val="bg1"/>
+                </a:solidFill>
+              </a:rPr>
+              <a:t>You are good </a:t>
+            </a:r>
+            <a:r>
+              <a:rPr lang="en-GB" sz="4000" dirty="0" err="1">
+                <a:solidFill>
+                  <a:schemeClr val="bg1"/>
+                </a:solidFill>
+              </a:rPr>
+              <a:t>good</a:t>
+            </a:r>
+            <a:r>
+              <a:rPr lang="en-GB" sz="4000" dirty="0">
+                <a:solidFill>
+                  <a:schemeClr val="bg1"/>
+                </a:solidFill>
+              </a:rPr>
+              <a:t> oh</a:t>
+            </a:r>
+          </a:p>
+          <a:p>
+            <a:r>
+              <a:rPr lang="en-GB" sz="4000" dirty="0">
+                <a:solidFill>
+                  <a:schemeClr val="bg1"/>
+                </a:solidFill>
+              </a:rPr>
+              <a:t>You are good </a:t>
+            </a:r>
+            <a:r>
+              <a:rPr lang="en-GB" sz="4000" dirty="0" err="1">
+                <a:solidFill>
+                  <a:schemeClr val="bg1"/>
+                </a:solidFill>
+              </a:rPr>
+              <a:t>good</a:t>
+            </a:r>
+            <a:r>
+              <a:rPr lang="en-GB" sz="4000" dirty="0">
+                <a:solidFill>
+                  <a:schemeClr val="bg1"/>
+                </a:solidFill>
+              </a:rPr>
+              <a:t> oh</a:t>
+            </a:r>
+          </a:p>
+          <a:p>
+            <a:r>
+              <a:rPr lang="en-GB" sz="4000" dirty="0">
+                <a:solidFill>
+                  <a:schemeClr val="bg1"/>
+                </a:solidFill>
+              </a:rPr>
+              <a:t>You are good </a:t>
+            </a:r>
+            <a:r>
+              <a:rPr lang="en-GB" sz="4000" dirty="0" err="1">
+                <a:solidFill>
+                  <a:schemeClr val="bg1"/>
+                </a:solidFill>
+              </a:rPr>
+              <a:t>good</a:t>
+            </a:r>
+            <a:r>
+              <a:rPr lang="en-GB" sz="4000" dirty="0">
+                <a:solidFill>
+                  <a:schemeClr val="bg1"/>
+                </a:solidFill>
+              </a:rPr>
+              <a:t> oh</a:t>
+            </a:r>
+          </a:p>
+        </p:txBody>
+      </p:sp>
+      <p:sp>
+        <p:nvSpPr>
+          <p:cNvPr id="4" name="TextBox 3">
+            <a:extLst>
+              <a:ext uri="{FF2B5EF4-FFF2-40B4-BE49-F238E27FC236}">
+                <a16:creationId xmlns:a16="http://schemas.microsoft.com/office/drawing/2014/main" id="{01C23E1D-F143-B56A-117D-308F1B0BD4D1}"/>
+              </a:ext>
+            </a:extLst>
+          </p:cNvPr>
+          <p:cNvSpPr txBox="1"/>
+          <p:nvPr/>
+        </p:nvSpPr>
+        <p:spPr>
+          <a:xfrm>
+            <a:off x="8529729" y="0"/>
+            <a:ext cx="628698" cy="461665"/>
+          </a:xfrm>
+          <a:prstGeom prst="rect">
+            <a:avLst/>
+          </a:prstGeom>
+          <a:noFill/>
+        </p:spPr>
+        <p:txBody>
+          <a:bodyPr wrap="none" rtlCol="0">
+            <a:spAutoFit/>
+          </a:bodyPr>
+          <a:lstStyle/>
+          <a:p>
+            <a:r>
+              <a:rPr lang="en-GB" sz="2400" b="1" dirty="0">
+                <a:solidFill>
+                  <a:schemeClr val="bg1"/>
+                </a:solidFill>
+              </a:rPr>
+              <a:t>6/6</a:t>
+            </a:r>
+          </a:p>
+        </p:txBody>
+      </p:sp>
+    </p:spTree>
+    <p:extLst>
+      <p:ext uri="{BB962C8B-B14F-4D97-AF65-F5344CB8AC3E}">
+        <p14:creationId xmlns:p14="http://schemas.microsoft.com/office/powerpoint/2010/main" val="3172720800"/>
       </p:ext>
     </p:extLst>
   </p:cSld>
